--- a/slides/Team10_Midterm.pptx
+++ b/slides/Team10_Midterm.pptx
@@ -238,7 +238,7 @@
 </file>
 
 <file path=ppt/notesSlides/notesSlide1.xml><?xml version="1.0" encoding="utf-8"?>
-<p:notes xmlns:a="http://schemas.openxmlformats.org/drawingml/2006/main" xmlns:ns2="http://schemas.microsoft.com/office/powerpoint/2010/main" xmlns:p="http://schemas.openxmlformats.org/presentationml/2006/main">
+<p:notes xmlns:a="http://schemas.openxmlformats.org/drawingml/2006/main" xmlns:r="http://schemas.openxmlformats.org/officeDocument/2006/relationships" xmlns:p="http://schemas.openxmlformats.org/presentationml/2006/main">
   <p:cSld>
     <p:spTree>
       <p:nvGrpSpPr>
@@ -287,10 +287,7 @@
             </a:r>
           </a:p>
           <a:p>
-            <a:r>
-              <a:rPr lang="en-US"/>
-              <a:t/>
-            </a:r>
+            <a:endParaRPr lang="en-US"/>
           </a:p>
           <a:p>
             <a:r>
@@ -329,10 +326,7 @@
             </a:r>
           </a:p>
           <a:p>
-            <a:r>
-              <a:rPr lang="en-US"/>
-              <a:t/>
-            </a:r>
+            <a:endParaRPr lang="en-US"/>
           </a:p>
           <a:p>
             <a:r>
@@ -341,10 +335,7 @@
             </a:r>
           </a:p>
           <a:p>
-            <a:r>
-              <a:rPr lang="en-US"/>
-              <a:t/>
-            </a:r>
+            <a:endParaRPr lang="en-US"/>
           </a:p>
           <a:p>
             <a:r>
@@ -353,10 +344,7 @@
             </a:r>
           </a:p>
           <a:p>
-            <a:r>
-              <a:rPr lang="en-US"/>
-              <a:t/>
-            </a:r>
+            <a:endParaRPr lang="en-US"/>
           </a:p>
           <a:p>
             <a:r>
@@ -365,10 +353,7 @@
             </a:r>
           </a:p>
           <a:p>
-            <a:r>
-              <a:rPr lang="en-US"/>
-              <a:t/>
-            </a:r>
+            <a:endParaRPr lang="en-US"/>
           </a:p>
           <a:p>
             <a:r>
@@ -383,10 +368,7 @@
             </a:r>
           </a:p>
           <a:p>
-            <a:r>
-              <a:rPr lang="en-US"/>
-              <a:t/>
-            </a:r>
+            <a:endParaRPr lang="en-US"/>
           </a:p>
           <a:p>
             <a:r>
@@ -401,10 +383,7 @@
             </a:r>
           </a:p>
           <a:p>
-            <a:r>
-              <a:rPr lang="en-US"/>
-              <a:t/>
-            </a:r>
+            <a:endParaRPr lang="en-US"/>
           </a:p>
           <a:p>
             <a:r>
@@ -419,10 +398,7 @@
             </a:r>
           </a:p>
           <a:p>
-            <a:r>
-              <a:rPr lang="en-US"/>
-              <a:t/>
-            </a:r>
+            <a:endParaRPr lang="en-US"/>
           </a:p>
           <a:p>
             <a:r>
@@ -449,10 +425,7 @@
             </a:r>
           </a:p>
           <a:p>
-            <a:r>
-              <a:rPr lang="en-US"/>
-              <a:t/>
-            </a:r>
+            <a:endParaRPr lang="en-US"/>
           </a:p>
           <a:p>
             <a:r>
@@ -479,10 +452,7 @@
             </a:r>
           </a:p>
           <a:p>
-            <a:r>
-              <a:rPr lang="en-US"/>
-              <a:t/>
-            </a:r>
+            <a:endParaRPr lang="en-US"/>
           </a:p>
           <a:p>
             <a:r>
@@ -503,10 +473,7 @@
             </a:r>
           </a:p>
           <a:p>
-            <a:r>
-              <a:rPr lang="en-US"/>
-              <a:t/>
-            </a:r>
+            <a:endParaRPr lang="en-US"/>
           </a:p>
           <a:p>
             <a:r>
@@ -551,10 +518,7 @@
             </a:r>
           </a:p>
           <a:p>
-            <a:r>
-              <a:rPr lang="en-US"/>
-              <a:t/>
-            </a:r>
+            <a:endParaRPr lang="en-US"/>
           </a:p>
         </p:txBody>
       </p:sp>
@@ -584,7 +548,7 @@
     </p:spTree>
     <p:extLst>
       <p:ext uri="{BB962C8B-B14F-4D97-AF65-F5344CB8AC3E}">
-        <ns2:creationId val="1024086991"/>
+        <p14:creationId xmlns:p14="http://schemas.microsoft.com/office/powerpoint/2010/main" val="1024086991"/>
       </p:ext>
     </p:extLst>
   </p:cSld>
@@ -2839,7 +2803,7 @@
 </file>
 
 <file path=ppt/slides/slide1.xml><?xml version="1.0" encoding="utf-8"?>
-<p:sld xmlns:a="http://schemas.openxmlformats.org/drawingml/2006/main" xmlns:p="http://schemas.openxmlformats.org/presentationml/2006/main" xmlns:r="http://schemas.openxmlformats.org/officeDocument/2006/relationships">
+<p:sld xmlns:a="http://schemas.openxmlformats.org/drawingml/2006/main" xmlns:r="http://schemas.openxmlformats.org/officeDocument/2006/relationships" xmlns:p="http://schemas.openxmlformats.org/presentationml/2006/main">
   <p:cSld name="Slide 1">
     <p:spTree>
       <p:nvGrpSpPr>
@@ -2949,42 +2913,6 @@
       </p:sp>
       <p:sp>
         <p:nvSpPr>
-          <p:cNvPr id="7" name="Text 4"/>
-          <p:cNvSpPr>
-            <a:spLocks noGrp="1"/>
-          </p:cNvSpPr>
-          <p:nvPr>
-            <p:ph type="body" idx="4294967295" hasCustomPrompt="1"/>
-          </p:nvPr>
-        </p:nvSpPr>
-        <p:spPr>
-          <a:xfrm>
-            <a:off x="9921240" y="1051560"/>
-            <a:ext cx="1856232" cy="292608"/>
-          </a:xfrm>
-          <a:prstGeom prst="rect">
-            <a:avLst/>
-          </a:prstGeom>
-        </p:spPr>
-        <p:txBody>
-          <a:bodyPr>
-            <a:noAutofit/>
-          </a:bodyPr>
-          <a:lstStyle/>
-          <a:p>
-            <a:pPr marL="0" indent="0">
-              <a:buNone/>
-            </a:pPr>
-            <a:r>
-              <a:rPr lang="en-US"/>
-              <a:t>AT RISK</a:t>
-            </a:r>
-            <a:endParaRPr lang="en-US" dirty="0"/>
-          </a:p>
-        </p:txBody>
-      </p:sp>
-      <p:sp>
-        <p:nvSpPr>
           <p:cNvPr id="8" name="Text 7"/>
           <p:cNvSpPr>
             <a:spLocks noGrp="1"/>
@@ -3070,7 +2998,9 @@
       <p:pic>
         <p:nvPicPr>
           <p:cNvPr id="11" name="Workload availability plot" descr="24 official and 100 synthetic workload graphs; official count shown as reference, not a latency baseline."/>
-          <p:cNvPicPr/>
+          <p:cNvPicPr>
+            <a:picLocks noGrp="1"/>
+          </p:cNvPicPr>
           <p:nvPr>
             <p:ph type="pic" idx="122"/>
           </p:nvPr>
